--- a/course/高校实验室安全/课件/004_三级管理与安全责任.pptx
+++ b/course/高校实验室安全/课件/004_三级管理与安全责任.pptx
@@ -532,12 +532,6 @@
               <a:t>进入一个实验室，首先要知道这条链条上的人分别是谁、怎么联系。</a:t>
             </a:r>
           </a:p>
-          <a:p/>
-          <a:p>
-            <a:r>
-              <a:t>来源：合并了 11 个原知识点，最佳讲解取自 Microbiology Biosafety 45（详见 来源.tsv）</a:t>
-            </a:r>
-          </a:p>
         </p:txBody>
       </p:sp>
       <p:sp>
@@ -613,12 +607,6 @@
               <a:t>出现问题时，按本校程序逐级报告：先报告实验室负责人（或其代理人），再报学院，由学院报保卫处或实验室安全管理部门；情况紧急时可同时报告。发生火灾立即拨打 119，有人受伤需要急救时拨打 120，并在报警后向负责人和学校报告。</a:t>
             </a:r>
           </a:p>
-          <a:p/>
-          <a:p>
-            <a:r>
-              <a:t>来源：合并了 1 个原知识点，最佳讲解取自 BIORISK MANAGEMENT 25（详见 来源.tsv）</a:t>
-            </a:r>
-          </a:p>
         </p:txBody>
       </p:sp>
       <p:sp>
@@ -694,12 +682,6 @@
               <a:t>签字不是形式。学校会通过检查和考核了解各级责任是否落实，把实验室安全工作纳入单位和个人的考核：做得好的给予表彰，失职、渎职造成隐患或事故的，依照有关规定追究责任（具体以本校规定为准）。</a:t>
             </a:r>
           </a:p>
-          <a:p/>
-          <a:p>
-            <a:r>
-              <a:t>来源：合并了 2 个原知识点，最佳讲解取自 Microbiology Biosafety 45（详见 来源.tsv）</a:t>
-            </a:r>
-          </a:p>
         </p:txBody>
       </p:sp>
       <p:sp>
@@ -995,12 +977,6 @@
               <a:t>实验室负责人在本室范围内落实这些要求：申请和维护安全设施，淘汰老化、不合格的设备，确保防护用品数量和型号满足实验需要。学生发现设施设备缺失、损坏或防护用品不足时，应及时向负责人反映，而不是将就使用。</a:t>
             </a:r>
           </a:p>
-          <a:p/>
-          <a:p>
-            <a:r>
-              <a:t>来源：合并了 2 个原知识点，最佳讲解取自 Lab Safety Training - Essential Protocols 21（详见 来源.tsv）</a:t>
-            </a:r>
-          </a:p>
         </p:txBody>
       </p:sp>
       <p:sp>
@@ -1076,12 +1052,6 @@
               <a:t>负责人可以指定实验室安全员协助日常管理，但第一责任不因此转移。生物安全负责人、辐射安全负责人等专项职责分别在第 6 章、第 7 章讲解。</a:t>
             </a:r>
           </a:p>
-          <a:p/>
-          <a:p>
-            <a:r>
-              <a:t>来源：合并了 1 个原知识点，最佳讲解取自 Microbiology Biosafety 45（详见 来源.tsv）</a:t>
-            </a:r>
-          </a:p>
         </p:txBody>
       </p:sp>
       <p:sp>
@@ -1157,12 +1127,6 @@
               <a:t>代理人的姓名和联系方式应在门口信息牌或实验室显著位置写明，确保出现紧急情况时，实验室成员和救援人员能找到拿主意的人。负责人返回后，代理人应交接期间发生的情况。</a:t>
             </a:r>
           </a:p>
-          <a:p/>
-          <a:p>
-            <a:r>
-              <a:t>来源：合并了 1 个原知识点，最佳讲解取自 Microbiology Biosafety 45（详见 来源.tsv）</a:t>
-            </a:r>
-          </a:p>
         </p:txBody>
       </p:sp>
       <p:sp>
@@ -1238,12 +1202,6 @@
               <a:t>这些人员是实验室安全的重要资源：安全培训的报名、准入考核、危险化学品和废弃物的管理流程、安全设施的报修，以及对某项操作是否安全拿不准时的咨询，都可以找他们。</a:t>
             </a:r>
           </a:p>
-          <a:p/>
-          <a:p>
-            <a:r>
-              <a:t>来源：合并了 2 个原知识点，最佳讲解取自 Microbiology Biosafety 45（详见 来源.tsv）</a:t>
-            </a:r>
-          </a:p>
         </p:txBody>
       </p:sp>
       <p:sp>
@@ -1319,12 +1277,6 @@
               <a:t>安全员看到危险操作时，有责任当场提醒和叫停；发现隐患要及时报告实验室负责人，必要时报学院。安全员的职责是管安全，而不是盯实验进度、催产出——风险评估、合规检查、事故调查才是其主要工作。</a:t>
             </a:r>
           </a:p>
-          <a:p/>
-          <a:p>
-            <a:r>
-              <a:t>来源：合并了 4 个原知识点，最佳讲解取自 ACS Hazard Communication &amp; Safety 05（详见 来源.tsv）</a:t>
-            </a:r>
-          </a:p>
         </p:txBody>
       </p:sp>
       <p:sp>
@@ -1400,12 +1352,6 @@
               <a:t>研究生带本科生、老同学带新同学，同样承担带教责任。带教要遵循“先示范、再看着做、确认会了再放手”的顺序：先完整演示正确操作并讲清危险点，再让新人在旁监督下操作，确认其能独立、正确完成后，才允许单独操作。没有学会的操作、没有通过考核的设备，不能让新人单独上手。</a:t>
             </a:r>
           </a:p>
-          <a:p/>
-          <a:p>
-            <a:r>
-              <a:t>来源：合并了 2 个原知识点，最佳讲解取自 Microbiology Biosafety 45（详见 来源.tsv）</a:t>
-            </a:r>
-          </a:p>
         </p:txBody>
       </p:sp>
       <p:sp>
@@ -1481,12 +1427,6 @@
               <a:t>发现电线破损、设备异常、试剂泄漏等问题时，要及时报告，并在设备上挂“停用”标识，不要擅自拆修（电气维修须由持证电工进行）。实验中出现异常情况，先停下来、确保安全，再报告负责人。报告了，问题才能被及时处理。</a:t>
             </a:r>
           </a:p>
-          <a:p/>
-          <a:p>
-            <a:r>
-              <a:t>来源：合并了 5 个原知识点，最佳讲解取自 Microbiology Biosafety 45（详见 来源.tsv）</a:t>
-            </a:r>
-          </a:p>
         </p:txBody>
       </p:sp>
       <p:sp>
@@ -1560,12 +1500,6 @@
           <a:p>
             <a:r>
               <a:t>具体来说：你有权在实验前了解所用物质和设备的危险以及防护措施；遇到违反规定的要求或明显冒险的作业，有权拒绝，并可向学院或学校实验室安全管理部门报告；情况危急时，可以先停下、先撤离；如实报告隐患和未遂事件，学校鼓励并保护报告人，不应因此受到打击报复。</a:t>
-            </a:r>
-          </a:p>
-          <a:p/>
-          <a:p>
-            <a:r>
-              <a:t>来源：合并了 2 个原知识点，最佳讲解取自 Laboratory Ergonomics &amp; RSI 14（详见 来源.tsv）</a:t>
             </a:r>
           </a:p>
         </p:txBody>
